--- a/Day 3 Part 3/D1P3.pptx
+++ b/Day 3 Part 3/D1P3.pptx
@@ -306,20 +306,12 @@
 </p:presentation>
 </file>
 
-<file path=ppt/revisionInfo.xml><?xml version="1.0" encoding="utf-8"?>
-<p1510:revInfo xmlns:a="http://schemas.openxmlformats.org/drawingml/2006/main" xmlns:r="http://schemas.openxmlformats.org/officeDocument/2006/relationships" xmlns:p1510="http://schemas.microsoft.com/office/powerpoint/2015/10/main">
-  <p1510:revLst>
-    <p1510:client id="{ABB3036F-2DCE-4E90-884A-AA825FCA7AE0}" v="2" dt="2026-03-15T14:52:27.818"/>
-  </p1510:revLst>
-</p1510:revInfo>
-</file>
-
 <file path=ppt/changesInfos/changesInfo1.xml><?xml version="1.0" encoding="utf-8"?>
 <pc:chgInfo xmlns:a="http://schemas.openxmlformats.org/drawingml/2006/main" xmlns:r="http://schemas.openxmlformats.org/officeDocument/2006/relationships" xmlns:ac="http://schemas.microsoft.com/office/drawing/2013/main/command" xmlns:pc="http://schemas.microsoft.com/office/powerpoint/2013/main/command">
   <pc:docChgLst>
     <pc:chgData name="Matthieu De Mari" userId="dfb708c9-d8dc-439f-9a3b-c772bf4a311c" providerId="ADAL" clId="{81E9B007-0C2C-493E-9B93-55A62C9C1F12}"/>
     <pc:docChg chg="custSel addSld delSld modSld delSection modSection">
-      <pc:chgData name="Matthieu De Mari" userId="dfb708c9-d8dc-439f-9a3b-c772bf4a311c" providerId="ADAL" clId="{81E9B007-0C2C-493E-9B93-55A62C9C1F12}" dt="2026-03-15T14:53:24.977" v="100" actId="20577"/>
+      <pc:chgData name="Matthieu De Mari" userId="dfb708c9-d8dc-439f-9a3b-c772bf4a311c" providerId="ADAL" clId="{81E9B007-0C2C-493E-9B93-55A62C9C1F12}" dt="2026-04-10T07:08:33.136" v="130" actId="20577"/>
       <pc:docMkLst>
         <pc:docMk/>
       </pc:docMkLst>
@@ -350,6 +342,21 @@
             <pc:docMk/>
             <pc:sldMk cId="1040156172" sldId="377"/>
             <ac:spMk id="2" creationId="{080CEB46-CC16-4D19-8C2C-AEE9471D8168}"/>
+          </ac:spMkLst>
+        </pc:spChg>
+      </pc:sldChg>
+      <pc:sldChg chg="modSp mod">
+        <pc:chgData name="Matthieu De Mari" userId="dfb708c9-d8dc-439f-9a3b-c772bf4a311c" providerId="ADAL" clId="{81E9B007-0C2C-493E-9B93-55A62C9C1F12}" dt="2026-03-27T08:35:45.578" v="104" actId="20577"/>
+        <pc:sldMkLst>
+          <pc:docMk/>
+          <pc:sldMk cId="2027569327" sldId="403"/>
+        </pc:sldMkLst>
+        <pc:spChg chg="mod">
+          <ac:chgData name="Matthieu De Mari" userId="dfb708c9-d8dc-439f-9a3b-c772bf4a311c" providerId="ADAL" clId="{81E9B007-0C2C-493E-9B93-55A62C9C1F12}" dt="2026-03-27T08:35:45.578" v="104" actId="20577"/>
+          <ac:spMkLst>
+            <pc:docMk/>
+            <pc:sldMk cId="2027569327" sldId="403"/>
+            <ac:spMk id="3" creationId="{B13F2521-723B-8848-9FA6-FE0E53521333}"/>
           </ac:spMkLst>
         </pc:spChg>
       </pc:sldChg>
@@ -439,6 +446,21 @@
           </ac:spMkLst>
         </pc:spChg>
       </pc:sldChg>
+      <pc:sldChg chg="modSp mod">
+        <pc:chgData name="Matthieu De Mari" userId="dfb708c9-d8dc-439f-9a3b-c772bf4a311c" providerId="ADAL" clId="{81E9B007-0C2C-493E-9B93-55A62C9C1F12}" dt="2026-04-10T07:08:33.136" v="130" actId="20577"/>
+        <pc:sldMkLst>
+          <pc:docMk/>
+          <pc:sldMk cId="2205233734" sldId="625"/>
+        </pc:sldMkLst>
+        <pc:spChg chg="mod">
+          <ac:chgData name="Matthieu De Mari" userId="dfb708c9-d8dc-439f-9a3b-c772bf4a311c" providerId="ADAL" clId="{81E9B007-0C2C-493E-9B93-55A62C9C1F12}" dt="2026-04-10T07:08:33.136" v="130" actId="20577"/>
+          <ac:spMkLst>
+            <pc:docMk/>
+            <pc:sldMk cId="2205233734" sldId="625"/>
+            <ac:spMk id="3" creationId="{3C5B4CE5-C219-AEE6-C266-01E7734BB23B}"/>
+          </ac:spMkLst>
+        </pc:spChg>
+      </pc:sldChg>
       <pc:sldChg chg="add">
         <pc:chgData name="Matthieu De Mari" userId="dfb708c9-d8dc-439f-9a3b-c772bf4a311c" providerId="ADAL" clId="{81E9B007-0C2C-493E-9B93-55A62C9C1F12}" dt="2026-03-15T14:52:19.683" v="44"/>
         <pc:sldMkLst>
@@ -554,7 +576,7 @@
           <a:p>
             <a:fld id="{61478373-EB31-4867-8CF0-FA31364748A5}" type="datetimeFigureOut">
               <a:rPr lang="en-GB" smtClean="0"/>
-              <a:t>15/03/2026</a:t>
+              <a:t>10/04/2026</a:t>
             </a:fld>
             <a:endParaRPr lang="en-GB"/>
           </a:p>
@@ -971,7 +993,7 @@
           <a:p>
             <a:fld id="{E85DF616-B21E-4EF6-A6A5-95E2FB3EB1A1}" type="datetimeFigureOut">
               <a:rPr lang="en-GB" smtClean="0"/>
-              <a:t>15/03/2026</a:t>
+              <a:t>10/04/2026</a:t>
             </a:fld>
             <a:endParaRPr lang="en-GB"/>
           </a:p>
@@ -1171,7 +1193,7 @@
           <a:p>
             <a:fld id="{E85DF616-B21E-4EF6-A6A5-95E2FB3EB1A1}" type="datetimeFigureOut">
               <a:rPr lang="en-GB" smtClean="0"/>
-              <a:t>15/03/2026</a:t>
+              <a:t>10/04/2026</a:t>
             </a:fld>
             <a:endParaRPr lang="en-GB"/>
           </a:p>
@@ -1381,7 +1403,7 @@
           <a:p>
             <a:fld id="{E85DF616-B21E-4EF6-A6A5-95E2FB3EB1A1}" type="datetimeFigureOut">
               <a:rPr lang="en-GB" smtClean="0"/>
-              <a:t>15/03/2026</a:t>
+              <a:t>10/04/2026</a:t>
             </a:fld>
             <a:endParaRPr lang="en-GB"/>
           </a:p>
@@ -1581,7 +1603,7 @@
           <a:p>
             <a:fld id="{E85DF616-B21E-4EF6-A6A5-95E2FB3EB1A1}" type="datetimeFigureOut">
               <a:rPr lang="en-GB" smtClean="0"/>
-              <a:t>15/03/2026</a:t>
+              <a:t>10/04/2026</a:t>
             </a:fld>
             <a:endParaRPr lang="en-GB"/>
           </a:p>
@@ -1857,7 +1879,7 @@
           <a:p>
             <a:fld id="{E85DF616-B21E-4EF6-A6A5-95E2FB3EB1A1}" type="datetimeFigureOut">
               <a:rPr lang="en-GB" smtClean="0"/>
-              <a:t>15/03/2026</a:t>
+              <a:t>10/04/2026</a:t>
             </a:fld>
             <a:endParaRPr lang="en-GB"/>
           </a:p>
@@ -2125,7 +2147,7 @@
           <a:p>
             <a:fld id="{E85DF616-B21E-4EF6-A6A5-95E2FB3EB1A1}" type="datetimeFigureOut">
               <a:rPr lang="en-GB" smtClean="0"/>
-              <a:t>15/03/2026</a:t>
+              <a:t>10/04/2026</a:t>
             </a:fld>
             <a:endParaRPr lang="en-GB"/>
           </a:p>
@@ -2540,7 +2562,7 @@
           <a:p>
             <a:fld id="{E85DF616-B21E-4EF6-A6A5-95E2FB3EB1A1}" type="datetimeFigureOut">
               <a:rPr lang="en-GB" smtClean="0"/>
-              <a:t>15/03/2026</a:t>
+              <a:t>10/04/2026</a:t>
             </a:fld>
             <a:endParaRPr lang="en-GB"/>
           </a:p>
@@ -2682,7 +2704,7 @@
           <a:p>
             <a:fld id="{E85DF616-B21E-4EF6-A6A5-95E2FB3EB1A1}" type="datetimeFigureOut">
               <a:rPr lang="en-GB" smtClean="0"/>
-              <a:t>15/03/2026</a:t>
+              <a:t>10/04/2026</a:t>
             </a:fld>
             <a:endParaRPr lang="en-GB"/>
           </a:p>
@@ -2795,7 +2817,7 @@
           <a:p>
             <a:fld id="{E85DF616-B21E-4EF6-A6A5-95E2FB3EB1A1}" type="datetimeFigureOut">
               <a:rPr lang="en-GB" smtClean="0"/>
-              <a:t>15/03/2026</a:t>
+              <a:t>10/04/2026</a:t>
             </a:fld>
             <a:endParaRPr lang="en-GB"/>
           </a:p>
@@ -3108,7 +3130,7 @@
           <a:p>
             <a:fld id="{E85DF616-B21E-4EF6-A6A5-95E2FB3EB1A1}" type="datetimeFigureOut">
               <a:rPr lang="en-GB" smtClean="0"/>
-              <a:t>15/03/2026</a:t>
+              <a:t>10/04/2026</a:t>
             </a:fld>
             <a:endParaRPr lang="en-GB"/>
           </a:p>
@@ -3397,7 +3419,7 @@
           <a:p>
             <a:fld id="{E85DF616-B21E-4EF6-A6A5-95E2FB3EB1A1}" type="datetimeFigureOut">
               <a:rPr lang="en-GB" smtClean="0"/>
-              <a:t>15/03/2026</a:t>
+              <a:t>10/04/2026</a:t>
             </a:fld>
             <a:endParaRPr lang="en-GB"/>
           </a:p>
@@ -3640,7 +3662,7 @@
           <a:p>
             <a:fld id="{E85DF616-B21E-4EF6-A6A5-95E2FB3EB1A1}" type="datetimeFigureOut">
               <a:rPr lang="en-GB" smtClean="0"/>
-              <a:t>15/03/2026</a:t>
+              <a:t>10/04/2026</a:t>
             </a:fld>
             <a:endParaRPr lang="en-GB"/>
           </a:p>
@@ -4989,7 +5011,15 @@
             </a:pPr>
             <a:r>
               <a:rPr lang="en-GB" b="1" dirty="0"/>
-              <a:t>We strongly advise to pick the Term 7 Computer Vision course, to continue your learning!</a:t>
+              <a:t>We strongly advise to pick and study </a:t>
+            </a:r>
+            <a:r>
+              <a:rPr lang="en-GB" b="1"/>
+              <a:t>an advanced Computer </a:t>
+            </a:r>
+            <a:r>
+              <a:rPr lang="en-GB" b="1" dirty="0"/>
+              <a:t>Vision course, to continue your learning!</a:t>
             </a:r>
           </a:p>
           <a:p>
@@ -5193,7 +5223,7 @@
                 </a:r>
                 <a:r>
                   <a:rPr lang="en-GB" dirty="0"/>
-                  <a:t> consists of a CNN model, similar to the one in Week4, Notebook 5. It was one of the first architectures to combine Conv2d layers with Dropout, Pooling and </a:t>
+                  <a:t> consists of a CNN model, similar to the one in D1P2, Notebook 5. It was one of the first architectures to combine Conv2d layers with Dropout, Pooling and </a:t>
                 </a:r>
                 <a:r>
                   <a:rPr lang="en-GB" dirty="0" err="1"/>
@@ -5276,7 +5306,7 @@
               <a:lstStyle/>
               <a:p>
                 <a:r>
-                  <a:rPr lang="en-SG">
+                  <a:rPr lang="en-GB">
                     <a:noFill/>
                   </a:rPr>
                   <a:t> </a:t>
